--- a/PPT-version/Predictive-AI-MLOps/Predictive-AI-MLOps-讲义.pptx
+++ b/PPT-version/Predictive-AI-MLOps/Predictive-AI-MLOps-讲义.pptx
@@ -18690,7 +18690,7 @@
                 </a:solidFill>
                 <a:latin typeface="Calibri"/>
               </a:rPr>
-              <a:t>GBDT，Gradient Boosting Decision Tree；常见实现 XGBoost / LightGBM / CatBoost。排序那行的指标写作 precision@k，k 就是你每天处理得了的条数。基础模型有明确的规模上限，按官方文档：TabPFNv2 到 1 万样本 / 500 特征，TabPFN-3 到 100 万行 × 200 特征（2026-08-02 核实）。</a:t>
+              <a:t>GBDT，Gradient Boosting Decision Tree；常见实现 XGBoost / LightGBM / CatBoost。排序那行的指标写作 precision@k，k 就是你每天处理得了的条数。基础模型有明确的规模上限，按官方文档：TabPFNv2 到 1 万样本 / 500 特征，TabPFN-3 到 100 万行、2000 列，不能同时取满（2026-10-20 核实）。</a:t>
             </a:r>
           </a:p>
         </p:txBody>
@@ -38558,7 +38558,7 @@
                           </a:solidFill>
                           <a:latin typeface="Calibri"/>
                         </a:rPr>
-                        <a:t>SageMaker 靠 write_time 自建</a:t>
+                        <a:t>SageMaker 按事件时间列自建</a:t>
                       </a:r>
                     </a:p>
                   </a:txBody>
@@ -58702,7 +58702,7 @@
                 </a:solidFill>
                 <a:latin typeface="Calibri"/>
               </a:rPr>
-              <a:t>新版全文没出现「AI」「机器学习」——它按是不是模型管，不按用没用 AI 管。</a:t>
+              <a:t>新版脚注把生成式与智能体 AI 排除在外，非生成式 AI 模型照管——按是不是模型管。</a:t>
             </a:r>
           </a:p>
         </p:txBody>
